--- a/media/exports/trades-sample-statements.pptx
+++ b/media/exports/trades-sample-statements.pptx
@@ -5540,38 +5540,6 @@
               <a:t>September 2026: Locked. September 2026 is locked (closed 2 Oct 2026). These numbers won't change.</a:t>
             </a:r>
           </a:p>
-          <a:p>
-            <a:pPr>
-              <a:defRPr>
-                <a:latin typeface="Roboto"/>
-              </a:defRPr>
-            </a:pPr>
-            <a:r>
-              <a:rPr sz="1100" b="0">
-                <a:solidFill>
-                  <a:srgbClr val="5F6F63"/>
-                </a:solidFill>
-                <a:latin typeface="Roboto"/>
-              </a:rPr>
-              <a:t>August 2026: Locked. August 2026 is locked (closed 2 Sep 2026). These numbers won't change.</a:t>
-            </a:r>
-          </a:p>
-          <a:p>
-            <a:pPr>
-              <a:defRPr>
-                <a:latin typeface="Roboto"/>
-              </a:defRPr>
-            </a:pPr>
-            <a:r>
-              <a:rPr sz="1100" b="0">
-                <a:solidFill>
-                  <a:srgbClr val="5F6F63"/>
-                </a:solidFill>
-                <a:latin typeface="Roboto"/>
-              </a:rPr>
-              <a:t>October 2026: Incomplete. October 2026 is still in progress: figures to 6 Oct only.</a:t>
-            </a:r>
-          </a:p>
         </p:txBody>
       </p:sp>
       <p:sp>
@@ -5647,7 +5615,7 @@
                 </a:solidFill>
                 <a:latin typeface="Roboto"/>
               </a:rPr>
-              <a:t>Data retrieved 2pm, Tue 6 Oct 2026 · Generated 9 Oct 2026, 8:39am · Sample data · Made with Python (python-pptx)</a:t>
+              <a:t>Data retrieved 2pm, Tue 6 Oct 2026 · Generated 22 Oct 2026, 4:57pm · Sample data · Made with Python (python-pptx)</a:t>
             </a:r>
           </a:p>
         </p:txBody>
@@ -7583,7 +7551,7 @@
                 </a:solidFill>
                 <a:latin typeface="Roboto"/>
               </a:rPr>
-              <a:t>Data retrieved 2pm, Tue 6 Oct 2026 · Generated 9 Oct 2026, 8:39am · Sample data · Made with Python (python-pptx)</a:t>
+              <a:t>Data retrieved 2pm, Tue 6 Oct 2026 · Generated 22 Oct 2026, 4:57pm · Sample data · Made with Python (python-pptx)</a:t>
             </a:r>
           </a:p>
         </p:txBody>
@@ -8749,7 +8717,7 @@
                 </a:solidFill>
                 <a:latin typeface="Roboto"/>
               </a:rPr>
-              <a:t>Data retrieved 2pm, Tue 6 Oct 2026 · Generated 9 Oct 2026, 8:39am · Sample data · Made with Python (python-pptx)</a:t>
+              <a:t>Data retrieved 2pm, Tue 6 Oct 2026 · Generated 22 Oct 2026, 4:57pm · Sample data · Made with Python (python-pptx)</a:t>
             </a:r>
           </a:p>
         </p:txBody>
@@ -10575,7 +10543,7 @@
                 </a:solidFill>
                 <a:latin typeface="Roboto"/>
               </a:rPr>
-              <a:t>Data retrieved 2pm, Tue 6 Oct 2026 · Generated 9 Oct 2026, 8:39am · Sample data · Made with Python (python-pptx)</a:t>
+              <a:t>Data retrieved 2pm, Tue 6 Oct 2026 · Generated 22 Oct 2026, 4:57pm · Sample data · Made with Python (python-pptx)</a:t>
             </a:r>
           </a:p>
         </p:txBody>
@@ -14135,7 +14103,7 @@
                 </a:solidFill>
                 <a:latin typeface="Roboto"/>
               </a:rPr>
-              <a:t>Data retrieved 2pm, Tue 6 Oct 2026 · Generated 9 Oct 2026, 8:39am · Sample data · Made with Python (python-pptx)</a:t>
+              <a:t>Data retrieved 2pm, Tue 6 Oct 2026 · Generated 22 Oct 2026, 4:57pm · Sample data · Made with Python (python-pptx)</a:t>
             </a:r>
           </a:p>
         </p:txBody>
@@ -16169,7 +16137,7 @@
                 </a:solidFill>
                 <a:latin typeface="Roboto"/>
               </a:rPr>
-              <a:t>Data retrieved 2pm, Tue 6 Oct 2026 · Generated 9 Oct 2026, 8:39am · Sample data · Made with Python (python-pptx)</a:t>
+              <a:t>Data retrieved 2pm, Tue 6 Oct 2026 · Generated 22 Oct 2026, 4:57pm · Sample data · Made with Python (python-pptx)</a:t>
             </a:r>
           </a:p>
         </p:txBody>
@@ -16621,7 +16589,7 @@
                 </a:solidFill>
                 <a:latin typeface="Roboto"/>
               </a:rPr>
-              <a:t>Data retrieved 2pm, Tue 6 Oct 2026 · Generated 9 Oct 2026, 8:39am · Sample data · Made with Python (python-pptx)</a:t>
+              <a:t>Data retrieved 2pm, Tue 6 Oct 2026 · Generated 22 Oct 2026, 4:57pm · Sample data · Made with Python (python-pptx)</a:t>
             </a:r>
           </a:p>
         </p:txBody>
@@ -17129,7 +17097,7 @@
                 </a:solidFill>
                 <a:latin typeface="Roboto"/>
               </a:rPr>
-              <a:t>Data retrieved 2pm, Tue 6 Oct 2026 · Generated 9 Oct 2026, 8:39am · Sample data · Made with Python (python-pptx)</a:t>
+              <a:t>Data retrieved 2pm, Tue 6 Oct 2026 · Generated 22 Oct 2026, 4:57pm · Sample data · Made with Python (python-pptx)</a:t>
             </a:r>
           </a:p>
         </p:txBody>
@@ -17693,7 +17661,7 @@
                 </a:solidFill>
                 <a:latin typeface="Roboto"/>
               </a:rPr>
-              <a:t>Data retrieved 2pm, Tue 6 Oct 2026 · Generated 9 Oct 2026, 8:39am · Sample data · Made with Python (python-pptx)</a:t>
+              <a:t>Data retrieved 2pm, Tue 6 Oct 2026 · Generated 22 Oct 2026, 4:57pm · Sample data · Made with Python (python-pptx)</a:t>
             </a:r>
           </a:p>
         </p:txBody>
@@ -18201,7 +18169,7 @@
                 </a:solidFill>
                 <a:latin typeface="Roboto"/>
               </a:rPr>
-              <a:t>Data retrieved 2pm, Tue 6 Oct 2026 · Generated 9 Oct 2026, 8:39am · Sample data · Made with Python (python-pptx)</a:t>
+              <a:t>Data retrieved 2pm, Tue 6 Oct 2026 · Generated 22 Oct 2026, 4:57pm · Sample data · Made with Python (python-pptx)</a:t>
             </a:r>
           </a:p>
         </p:txBody>
@@ -18821,7 +18789,7 @@
                 </a:solidFill>
                 <a:latin typeface="Roboto"/>
               </a:rPr>
-              <a:t>Data retrieved 2pm, Tue 6 Oct 2026 · Generated 9 Oct 2026, 8:39am · Sample data · Made with Python (python-pptx)</a:t>
+              <a:t>Data retrieved 2pm, Tue 6 Oct 2026 · Generated 22 Oct 2026, 4:57pm · Sample data · Made with Python (python-pptx)</a:t>
             </a:r>
           </a:p>
         </p:txBody>
@@ -19577,7 +19545,7 @@
                 </a:solidFill>
                 <a:latin typeface="Roboto"/>
               </a:rPr>
-              <a:t>Data retrieved 2pm, Tue 6 Oct 2026 · Generated 9 Oct 2026, 8:39am · Sample data · Made with Python (python-pptx)</a:t>
+              <a:t>Data retrieved 2pm, Tue 6 Oct 2026 · Generated 22 Oct 2026, 4:57pm · Sample data · Made with Python (python-pptx)</a:t>
             </a:r>
           </a:p>
         </p:txBody>
@@ -20006,7 +19974,7 @@
                 </a:solidFill>
                 <a:latin typeface="Roboto"/>
               </a:rPr>
-              <a:t>Data retrieved 2pm, Tue 6 Oct 2026 · Generated 9 Oct 2026, 8:39am · Sample data · Made with Python (python-pptx)</a:t>
+              <a:t>Data retrieved 2pm, Tue 6 Oct 2026 · Generated 22 Oct 2026, 4:57pm · Sample data · Made with Python (python-pptx)</a:t>
             </a:r>
           </a:p>
         </p:txBody>
@@ -20360,7 +20328,7 @@
                 </a:solidFill>
                 <a:latin typeface="Roboto"/>
               </a:rPr>
-              <a:t>Data retrieved 2pm, Tue 6 Oct 2026 · Generated 9 Oct 2026, 8:39am · Sample data · Made with Python (python-pptx)</a:t>
+              <a:t>Data retrieved 2pm, Tue 6 Oct 2026 · Generated 22 Oct 2026, 4:57pm · Sample data · Made with Python (python-pptx)</a:t>
             </a:r>
           </a:p>
         </p:txBody>
@@ -21256,7 +21224,7 @@
                 </a:solidFill>
                 <a:latin typeface="Roboto"/>
               </a:rPr>
-              <a:t>Data retrieved 2pm, Tue 6 Oct 2026 · Generated 9 Oct 2026, 8:39am · Sample data · Made with Python (python-pptx)</a:t>
+              <a:t>Data retrieved 2pm, Tue 6 Oct 2026 · Generated 22 Oct 2026, 4:57pm · Sample data · Made with Python (python-pptx)</a:t>
             </a:r>
           </a:p>
         </p:txBody>
@@ -21903,7 +21871,7 @@
                 </a:solidFill>
                 <a:latin typeface="Roboto"/>
               </a:rPr>
-              <a:t>Data retrieved 2pm, Tue 6 Oct 2026 · Generated 9 Oct 2026, 8:39am · Sample data · Made with Python (python-pptx)</a:t>
+              <a:t>Data retrieved 2pm, Tue 6 Oct 2026 · Generated 22 Oct 2026, 4:57pm · Sample data · Made with Python (python-pptx)</a:t>
             </a:r>
           </a:p>
         </p:txBody>
@@ -22799,7 +22767,7 @@
                 </a:solidFill>
                 <a:latin typeface="Roboto"/>
               </a:rPr>
-              <a:t>Data retrieved 2pm, Tue 6 Oct 2026 · Generated 9 Oct 2026, 8:39am · Sample data · Made with Python (python-pptx)</a:t>
+              <a:t>Data retrieved 2pm, Tue 6 Oct 2026 · Generated 22 Oct 2026, 4:57pm · Sample data · Made with Python (python-pptx)</a:t>
             </a:r>
           </a:p>
         </p:txBody>
@@ -24735,7 +24703,7 @@
                 </a:solidFill>
                 <a:latin typeface="Roboto"/>
               </a:rPr>
-              <a:t>Data retrieved 2pm, Tue 6 Oct 2026 · Generated 9 Oct 2026, 8:39am · Sample data · Made with Python (python-pptx)</a:t>
+              <a:t>Data retrieved 2pm, Tue 6 Oct 2026 · Generated 22 Oct 2026, 4:57pm · Sample data · Made with Python (python-pptx)</a:t>
             </a:r>
           </a:p>
         </p:txBody>
@@ -26231,7 +26199,7 @@
                 </a:solidFill>
                 <a:latin typeface="Roboto"/>
               </a:rPr>
-              <a:t>Data retrieved 2pm, Tue 6 Oct 2026 · Generated 9 Oct 2026, 8:39am · Sample data · Made with Python (python-pptx)</a:t>
+              <a:t>Data retrieved 2pm, Tue 6 Oct 2026 · Generated 22 Oct 2026, 4:57pm · Sample data · Made with Python (python-pptx)</a:t>
             </a:r>
           </a:p>
         </p:txBody>

--- a/media/exports/trades-sample-statements.pptx
+++ b/media/exports/trades-sample-statements.pptx
@@ -5275,62 +5275,30 @@
           </a:p>
         </p:txBody>
       </p:sp>
-      <p:sp>
-        <p:nvSpPr>
-          <p:cNvPr id="3" name="Rectangle 2"/>
-          <p:cNvSpPr/>
+      <p:pic>
+        <p:nvPicPr>
+          <p:cNvPr id="3" name="Picture 2" descr="mark-4th-180.png"/>
+          <p:cNvPicPr>
+            <a:picLocks noChangeAspect="1"/>
+          </p:cNvPicPr>
           <p:nvPr/>
-        </p:nvSpPr>
+        </p:nvPicPr>
+        <p:blipFill>
+          <a:blip r:embed="rId2"/>
+          <a:stretch>
+            <a:fillRect/>
+          </a:stretch>
+        </p:blipFill>
         <p:spPr>
           <a:xfrm>
-            <a:off x="457200" y="548640"/>
-            <a:ext cx="640080" cy="640080"/>
+            <a:off x="365760" y="457200"/>
+            <a:ext cx="822960" cy="822960"/>
           </a:xfrm>
           <a:prstGeom prst="rect">
             <a:avLst/>
           </a:prstGeom>
-          <a:solidFill>
-            <a:srgbClr val="2F7A5D"/>
-          </a:solidFill>
-          <a:ln>
-            <a:noFill/>
-          </a:ln>
         </p:spPr>
-        <p:style>
-          <a:lnRef idx="1">
-            <a:schemeClr val="accent1"/>
-          </a:lnRef>
-          <a:fillRef idx="3">
-            <a:schemeClr val="accent1"/>
-          </a:fillRef>
-          <a:effectRef idx="2">
-            <a:schemeClr val="accent1"/>
-          </a:effectRef>
-          <a:fontRef idx="minor">
-            <a:schemeClr val="lt1"/>
-          </a:fontRef>
-        </p:style>
-        <p:txBody>
-          <a:bodyPr rtlCol="0" anchor="ctr"/>
-          <a:lstStyle/>
-          <a:p>
-            <a:pPr>
-              <a:defRPr>
-                <a:latin typeface="Roboto"/>
-              </a:defRPr>
-            </a:pPr>
-            <a:r>
-              <a:rPr sz="1600" b="1">
-                <a:solidFill>
-                  <a:srgbClr val="FFFFFF"/>
-                </a:solidFill>
-                <a:latin typeface="Roboto"/>
-              </a:rPr>
-              <a:t>4th</a:t>
-            </a:r>
-          </a:p>
-        </p:txBody>
-      </p:sp>
+      </p:pic>
       <p:sp>
         <p:nvSpPr>
           <p:cNvPr id="4" name="TextBox 3"/>
@@ -5615,7 +5583,7 @@
                 </a:solidFill>
                 <a:latin typeface="Roboto"/>
               </a:rPr>
-              <a:t>Data retrieved 2pm, Tue 6 Oct 2026 · Generated 22 Oct 2026, 4:57pm · Sample data · Made with Python (python-pptx)</a:t>
+              <a:t>Data retrieved 2pm, Tue 6 Oct 2026 · Generated 28 Oct 2026, 12:45pm · Sample data · Made with Python (python-pptx)</a:t>
             </a:r>
           </a:p>
         </p:txBody>
@@ -7551,7 +7519,7 @@
                 </a:solidFill>
                 <a:latin typeface="Roboto"/>
               </a:rPr>
-              <a:t>Data retrieved 2pm, Tue 6 Oct 2026 · Generated 22 Oct 2026, 4:57pm · Sample data · Made with Python (python-pptx)</a:t>
+              <a:t>Data retrieved 2pm, Tue 6 Oct 2026 · Generated 28 Oct 2026, 12:45pm · Sample data · Made with Python (python-pptx)</a:t>
             </a:r>
           </a:p>
         </p:txBody>
@@ -8717,7 +8685,7 @@
                 </a:solidFill>
                 <a:latin typeface="Roboto"/>
               </a:rPr>
-              <a:t>Data retrieved 2pm, Tue 6 Oct 2026 · Generated 22 Oct 2026, 4:57pm · Sample data · Made with Python (python-pptx)</a:t>
+              <a:t>Data retrieved 2pm, Tue 6 Oct 2026 · Generated 28 Oct 2026, 12:45pm · Sample data · Made with Python (python-pptx)</a:t>
             </a:r>
           </a:p>
         </p:txBody>
@@ -10543,7 +10511,7 @@
                 </a:solidFill>
                 <a:latin typeface="Roboto"/>
               </a:rPr>
-              <a:t>Data retrieved 2pm, Tue 6 Oct 2026 · Generated 22 Oct 2026, 4:57pm · Sample data · Made with Python (python-pptx)</a:t>
+              <a:t>Data retrieved 2pm, Tue 6 Oct 2026 · Generated 28 Oct 2026, 12:45pm · Sample data · Made with Python (python-pptx)</a:t>
             </a:r>
           </a:p>
         </p:txBody>
@@ -14103,7 +14071,7 @@
                 </a:solidFill>
                 <a:latin typeface="Roboto"/>
               </a:rPr>
-              <a:t>Data retrieved 2pm, Tue 6 Oct 2026 · Generated 22 Oct 2026, 4:57pm · Sample data · Made with Python (python-pptx)</a:t>
+              <a:t>Data retrieved 2pm, Tue 6 Oct 2026 · Generated 28 Oct 2026, 12:45pm · Sample data · Made with Python (python-pptx)</a:t>
             </a:r>
           </a:p>
         </p:txBody>
@@ -16137,7 +16105,7 @@
                 </a:solidFill>
                 <a:latin typeface="Roboto"/>
               </a:rPr>
-              <a:t>Data retrieved 2pm, Tue 6 Oct 2026 · Generated 22 Oct 2026, 4:57pm · Sample data · Made with Python (python-pptx)</a:t>
+              <a:t>Data retrieved 2pm, Tue 6 Oct 2026 · Generated 28 Oct 2026, 12:45pm · Sample data · Made with Python (python-pptx)</a:t>
             </a:r>
           </a:p>
         </p:txBody>
@@ -16589,7 +16557,7 @@
                 </a:solidFill>
                 <a:latin typeface="Roboto"/>
               </a:rPr>
-              <a:t>Data retrieved 2pm, Tue 6 Oct 2026 · Generated 22 Oct 2026, 4:57pm · Sample data · Made with Python (python-pptx)</a:t>
+              <a:t>Data retrieved 2pm, Tue 6 Oct 2026 · Generated 28 Oct 2026, 12:45pm · Sample data · Made with Python (python-pptx)</a:t>
             </a:r>
           </a:p>
         </p:txBody>
@@ -17097,7 +17065,7 @@
                 </a:solidFill>
                 <a:latin typeface="Roboto"/>
               </a:rPr>
-              <a:t>Data retrieved 2pm, Tue 6 Oct 2026 · Generated 22 Oct 2026, 4:57pm · Sample data · Made with Python (python-pptx)</a:t>
+              <a:t>Data retrieved 2pm, Tue 6 Oct 2026 · Generated 28 Oct 2026, 12:45pm · Sample data · Made with Python (python-pptx)</a:t>
             </a:r>
           </a:p>
         </p:txBody>
@@ -17661,7 +17629,7 @@
                 </a:solidFill>
                 <a:latin typeface="Roboto"/>
               </a:rPr>
-              <a:t>Data retrieved 2pm, Tue 6 Oct 2026 · Generated 22 Oct 2026, 4:57pm · Sample data · Made with Python (python-pptx)</a:t>
+              <a:t>Data retrieved 2pm, Tue 6 Oct 2026 · Generated 28 Oct 2026, 12:45pm · Sample data · Made with Python (python-pptx)</a:t>
             </a:r>
           </a:p>
         </p:txBody>
@@ -18169,7 +18137,7 @@
                 </a:solidFill>
                 <a:latin typeface="Roboto"/>
               </a:rPr>
-              <a:t>Data retrieved 2pm, Tue 6 Oct 2026 · Generated 22 Oct 2026, 4:57pm · Sample data · Made with Python (python-pptx)</a:t>
+              <a:t>Data retrieved 2pm, Tue 6 Oct 2026 · Generated 28 Oct 2026, 12:45pm · Sample data · Made with Python (python-pptx)</a:t>
             </a:r>
           </a:p>
         </p:txBody>
@@ -18789,7 +18757,7 @@
                 </a:solidFill>
                 <a:latin typeface="Roboto"/>
               </a:rPr>
-              <a:t>Data retrieved 2pm, Tue 6 Oct 2026 · Generated 22 Oct 2026, 4:57pm · Sample data · Made with Python (python-pptx)</a:t>
+              <a:t>Data retrieved 2pm, Tue 6 Oct 2026 · Generated 28 Oct 2026, 12:45pm · Sample data · Made with Python (python-pptx)</a:t>
             </a:r>
           </a:p>
         </p:txBody>
@@ -19545,7 +19513,7 @@
                 </a:solidFill>
                 <a:latin typeface="Roboto"/>
               </a:rPr>
-              <a:t>Data retrieved 2pm, Tue 6 Oct 2026 · Generated 22 Oct 2026, 4:57pm · Sample data · Made with Python (python-pptx)</a:t>
+              <a:t>Data retrieved 2pm, Tue 6 Oct 2026 · Generated 28 Oct 2026, 12:45pm · Sample data · Made with Python (python-pptx)</a:t>
             </a:r>
           </a:p>
         </p:txBody>
@@ -19974,7 +19942,7 @@
                 </a:solidFill>
                 <a:latin typeface="Roboto"/>
               </a:rPr>
-              <a:t>Data retrieved 2pm, Tue 6 Oct 2026 · Generated 22 Oct 2026, 4:57pm · Sample data · Made with Python (python-pptx)</a:t>
+              <a:t>Data retrieved 2pm, Tue 6 Oct 2026 · Generated 28 Oct 2026, 12:45pm · Sample data · Made with Python (python-pptx)</a:t>
             </a:r>
           </a:p>
         </p:txBody>
@@ -20328,7 +20296,7 @@
                 </a:solidFill>
                 <a:latin typeface="Roboto"/>
               </a:rPr>
-              <a:t>Data retrieved 2pm, Tue 6 Oct 2026 · Generated 22 Oct 2026, 4:57pm · Sample data · Made with Python (python-pptx)</a:t>
+              <a:t>Data retrieved 2pm, Tue 6 Oct 2026 · Generated 28 Oct 2026, 12:45pm · Sample data · Made with Python (python-pptx)</a:t>
             </a:r>
           </a:p>
         </p:txBody>
@@ -21224,7 +21192,7 @@
                 </a:solidFill>
                 <a:latin typeface="Roboto"/>
               </a:rPr>
-              <a:t>Data retrieved 2pm, Tue 6 Oct 2026 · Generated 22 Oct 2026, 4:57pm · Sample data · Made with Python (python-pptx)</a:t>
+              <a:t>Data retrieved 2pm, Tue 6 Oct 2026 · Generated 28 Oct 2026, 12:45pm · Sample data · Made with Python (python-pptx)</a:t>
             </a:r>
           </a:p>
         </p:txBody>
@@ -21871,7 +21839,7 @@
                 </a:solidFill>
                 <a:latin typeface="Roboto"/>
               </a:rPr>
-              <a:t>Data retrieved 2pm, Tue 6 Oct 2026 · Generated 22 Oct 2026, 4:57pm · Sample data · Made with Python (python-pptx)</a:t>
+              <a:t>Data retrieved 2pm, Tue 6 Oct 2026 · Generated 28 Oct 2026, 12:45pm · Sample data · Made with Python (python-pptx)</a:t>
             </a:r>
           </a:p>
         </p:txBody>
@@ -22767,7 +22735,7 @@
                 </a:solidFill>
                 <a:latin typeface="Roboto"/>
               </a:rPr>
-              <a:t>Data retrieved 2pm, Tue 6 Oct 2026 · Generated 22 Oct 2026, 4:57pm · Sample data · Made with Python (python-pptx)</a:t>
+              <a:t>Data retrieved 2pm, Tue 6 Oct 2026 · Generated 28 Oct 2026, 12:45pm · Sample data · Made with Python (python-pptx)</a:t>
             </a:r>
           </a:p>
         </p:txBody>
@@ -24703,7 +24671,7 @@
                 </a:solidFill>
                 <a:latin typeface="Roboto"/>
               </a:rPr>
-              <a:t>Data retrieved 2pm, Tue 6 Oct 2026 · Generated 22 Oct 2026, 4:57pm · Sample data · Made with Python (python-pptx)</a:t>
+              <a:t>Data retrieved 2pm, Tue 6 Oct 2026 · Generated 28 Oct 2026, 12:45pm · Sample data · Made with Python (python-pptx)</a:t>
             </a:r>
           </a:p>
         </p:txBody>
@@ -26199,7 +26167,7 @@
                 </a:solidFill>
                 <a:latin typeface="Roboto"/>
               </a:rPr>
-              <a:t>Data retrieved 2pm, Tue 6 Oct 2026 · Generated 22 Oct 2026, 4:57pm · Sample data · Made with Python (python-pptx)</a:t>
+              <a:t>Data retrieved 2pm, Tue 6 Oct 2026 · Generated 28 Oct 2026, 12:45pm · Sample data · Made with Python (python-pptx)</a:t>
             </a:r>
           </a:p>
         </p:txBody>
